--- a/практика 1/Практическая_работа_1_Проектирование_ИС.pptx
+++ b/практика 1/Практическая_работа_1_Проектирование_ИС.pptx
@@ -516,7 +516,7 @@
           <a:lstStyle/>
           <a:p>
             <a:r>
-              <a:t>Здравствуйте! Меня зовут Ваздаев Даниил Ильич, группа УИБО-09-23, РТУ МИРЭА. Представляю разбор системы UPS ORION по дисциплине «Проектирование информационных систем». Здесь интересен не только алгоритм маршрутизации, но и переход от производственной проблемы к требованиям, архитектуре и внедрению. Основной вопрос такой: как встроить математическое решение в ежедневную работу, чтобы рассчитанный маршрут действительно выполнялся? Я рассматриваю первоначальное внедрение, завершенное в 2016 году. Фактическую основу дают открытые публикации, прежде всего интервью представителя UPS Джека Левиса. При этом схемы процессов, UML, логическая архитектура и учебный календарный план являются моей реконструкцией, а не внутренними документами компании. Это разграничение позволяет обсуждать проектные решения, не выдавая предположения за установленные факты. Сначала определим границы задачи, затем проследим изменения процесса и условия получения результата.</a:t>
+              <a:t>Здравствуйте! Мы — команда «Байтенки», РТУ МИРЭА. Представляем разбор системы UPS ORION по дисциплине «Проектирование информационных систем». Здесь интересен не только алгоритм маршрутизации, но и переход от производственной проблемы к требованиям, архитектуре и внедрению. Основной вопрос такой: как встроить математическое решение в ежедневную работу, чтобы рассчитанный маршрут действительно выполнялся? Мы рассматриваем первоначальное внедрение, завершенное в 2016 году. Фактическую основу дают открытые публикации, прежде всего интервью представителя UPS Джека Левиса. При этом схемы процессов, UML, логическая архитектура и учебный календарный план являются нашей реконструкцией, а не внутренними документами компании. Это разграничение позволяет обсуждать проектные решения, не выдавая предположения за установленные факты. Сначала определим границы задачи, затем проследим изменения процесса и условия получения результата.</a:t>
             </a:r>
           </a:p>
         </p:txBody>
@@ -796,7 +796,7 @@
           <a:lstStyle/>
           <a:p>
             <a:r>
-              <a:t>В качестве авторского направления развития предлагается прогнозировать длительность остановки методами машинного обучения. Идея не заменяет оптимизатор: прогноз вместе с оценкой неопределенности помогает сформировать резерв времени, который затем учитывает математическая модель. Человек сохраняет возможность проверить спорные условия. Для обучения нужны история остановок и релевантный контекст, но не избыточные персональные сведения. Критично избежать утечки будущей информации в обучение и проверить переносимость результата на другие условия. Пилот должен сравнивать подход с базовым решением без такого прогноза на сопоставимых маршрутах. Измерять следует не только ошибку модели, но и соблюдение обязательств, пробег, переработки и частоту вмешательств. Если прогноз точнее, а обслуживание хуже, улучшение не доказано. Экономический эффект остается гипотезой. Я не обещаю процент экономии и не утверждаю, что такая идея является новой для самой UPS.</a:t>
+              <a:t>В качестве авторского направления развития предлагается прогнозировать длительность остановки методами машинного обучения. Идея не заменяет оптимизатор: прогноз вместе с оценкой неопределенности помогает сформировать резерв времени, который затем учитывает математическая модель. Человек сохраняет возможность проверить спорные условия. Для обучения нужны история остановок и релевантный контекст, но не избыточные персональные сведения. Критично избежать утечки будущей информации в обучение и проверить переносимость результата на другие условия. Пилот должен сравнивать подход с базовым решением без такого прогноза на сопоставимых маршрутах. Измерять следует не только ошибку модели, но и соблюдение обязательств, пробег, переработки и частоту вмешательств. Если прогноз точнее, а обслуживание хуже, улучшение не доказано. Экономический эффект остается гипотезой. Мы не обещаем процент экономии и не утверждаем, что такая идея является новой для самой UPS.</a:t>
             </a:r>
           </a:p>
         </p:txBody>
@@ -1216,7 +1216,7 @@
           <a:lstStyle/>
           <a:p>
             <a:r>
-              <a:t>Из узких мест следует выводить конкретные требования. Первое соответствие: ручной выбор последовательности требует оптимизации с ограничениями обслуживания. Недостаточно потребовать просто «короткий маршрут», потому что такой критерий может противоречить обязательствам доставки. Второе соответствие: ошибки карт и координат требуют проверки исходных данных и понятной процедуры исправления. Быстрый расчет на неверном входе способен ускорить принятие плохого решения. Третье соответствие: трудности принятия рекомендаций водителями требуют обучения, объяснения логики и обработки обратной связи. Это не дополнительная активность после разработки, а условие работоспособности процесса. В учебном проекте я также закладываю сохранность заданий и диагностируемые отказы. Если решение не найдено, система должна сообщить об этом, а не представить неполный маршрут как успешный. Такая прослеживаемость связывает каждое требование с наблюдаемой проблемой и будущей приемочной проверкой.</a:t>
+              <a:t>Из узких мест следует выводить конкретные требования. Первое соответствие: ручной выбор последовательности требует оптимизации с ограничениями обслуживания. Недостаточно потребовать просто «короткий маршрут», потому что такой критерий может противоречить обязательствам доставки. Второе соответствие: ошибки карт и координат требуют проверки исходных данных и понятной процедуры исправления. Быстрый расчет на неверном входе способен ускорить принятие плохого решения. Третье соответствие: трудности принятия рекомендаций водителями требуют обучения, объяснения логики и обработки обратной связи. Это не дополнительная активность после разработки, а условие работоспособности процесса. В учебном проекте мы также закладываем сохранность заданий и диагностируемые отказы. Если решение не найдено, система должна сообщить об этом, а не представить неполный маршрут как успешный. Такая прослеживаемость связывает каждое требование с наблюдаемой проблемой и будущей приемочной проверкой.</a:t>
             </a:r>
           </a:p>
         </p:txBody>
@@ -4886,7 +4886,7 @@
               </a:defRPr>
             </a:pPr>
             <a:r>
-              <a:t>РЕАЛЬНЫЙ КЕЙС · ПЕРВОНАЧАЛЬНОЕ ВНЕДРЕНИЕ ДО 2016 ГОДА</a:t>
+              <a:t>РЕАЛЬНЫЙ КЕЙС · ВНЕДРЕНИЕ ЗАВЕРШЕНО В 2016 ГОДУ</a:t>
             </a:r>
           </a:p>
         </p:txBody>
@@ -5294,7 +5294,7 @@
               </a:defRPr>
             </a:pPr>
             <a:r>
-              <a:t>Ваздаев Даниил Ильич · УИБО-09-23</a:t>
+              <a:t>Работу выполнила команда «Байтенки»</a:t>
             </a:r>
           </a:p>
         </p:txBody>
